--- a/classes/parte-7-red-team-y-operaciones-ofensivas/174-compromiso-total-de-dominio-dcsync-y-golden-ticket/clase-174-presentacion.pptx
+++ b/classes/parte-7-red-team-y-operaciones-ofensivas/174-compromiso-total-de-dominio-dcsync-y-golden-ticket/clase-174-presentacion.pptx
@@ -17,6 +17,9 @@
     <p:sldId id="265" r:id="rId16"/>
     <p:sldId id="266" r:id="rId17"/>
     <p:sldId id="267" r:id="rId18"/>
+    <p:sldId id="268" r:id="rId19"/>
+    <p:sldId id="269" r:id="rId20"/>
+    <p:sldId id="270" r:id="rId21"/>
   </p:sldIdLst>
   <p:sldSz cx="9144000" cy="6858000" type="screen4x3"/>
   <p:notesSz cx="6858000" cy="9144000"/>
@@ -3198,7 +3201,7 @@
                   <a:srgbClr val="0B3D2E"/>
                 </a:solidFill>
               </a:rPr>
-              <a:t>⚠️ Errores comunes</a:t>
+              <a:t>✍️ Ejercicios</a:t>
             </a:r>
           </a:p>
         </p:txBody>
@@ -3236,67 +3239,82 @@
                   <a:srgbClr val="22282E"/>
                 </a:solidFill>
               </a:rPr>
-              <a:t>•  DCSync access denied — Falta el derecho de replicación; usa una cuenta/ruta que lo tenga</a:t>
-            </a:r>
-          </a:p>
-          <a:p>
-            <a:pPr>
-              <a:spcAft>
-                <a:spcPts val="600"/>
-              </a:spcAft>
-            </a:pPr>
-            <a:r>
-              <a:rPr sz="1500">
-                <a:solidFill>
-                  <a:srgbClr val="22282E"/>
-                </a:solidFill>
-              </a:rPr>
-              <a:t>•  Golden Ticket no funciona — SID o hash de krbtgt incorrectos; verifica ambos</a:t>
-            </a:r>
-          </a:p>
-          <a:p>
-            <a:pPr>
-              <a:spcAft>
-                <a:spcPts val="600"/>
-              </a:spcAft>
-            </a:pPr>
-            <a:r>
-              <a:rPr sz="1500">
-                <a:solidFill>
-                  <a:srgbClr val="22282E"/>
-                </a:solidFill>
-              </a:rPr>
-              <a:t>•  El ticket expira raro — Vida por defecto muy larga delata; ajusta tiempos realistas</a:t>
-            </a:r>
-          </a:p>
-          <a:p>
-            <a:pPr>
-              <a:spcAft>
-                <a:spcPts val="600"/>
-              </a:spcAft>
-            </a:pPr>
-            <a:r>
-              <a:rPr sz="1500">
-                <a:solidFill>
-                  <a:srgbClr val="22282E"/>
-                </a:solidFill>
-              </a:rPr>
-              <a:t>•  Silver no accede — Hash o SPN equivocado; usa el hash de la cuenta correcta</a:t>
-            </a:r>
-          </a:p>
-          <a:p>
-            <a:pPr>
-              <a:spcAft>
-                <a:spcPts val="600"/>
-              </a:spcAft>
-            </a:pPr>
-            <a:r>
-              <a:rPr sz="1500">
-                <a:solidFill>
-                  <a:srgbClr val="22282E"/>
-                </a:solidFill>
-              </a:rPr>
-              <a:t>•  Detectado por 4662 — DCSync desde un host no-DC es anómalo; asúmelo como telemetría</a:t>
+              <a:t>•  Explica por qué el hash de krbtgt permite forjar identidad de cualquier usuario.</a:t>
+            </a:r>
+          </a:p>
+          <a:p>
+            <a:pPr>
+              <a:spcAft>
+                <a:spcPts val="600"/>
+              </a:spcAft>
+            </a:pPr>
+            <a:r>
+              <a:rPr sz="1500">
+                <a:solidFill>
+                  <a:srgbClr val="22282E"/>
+                </a:solidFill>
+              </a:rPr>
+              <a:t>•  Ejecuta DCSync y extrae el hash de krbtgt del lab.</a:t>
+            </a:r>
+          </a:p>
+          <a:p>
+            <a:pPr>
+              <a:spcAft>
+                <a:spcPts val="600"/>
+              </a:spcAft>
+            </a:pPr>
+            <a:r>
+              <a:rPr sz="1500">
+                <a:solidFill>
+                  <a:srgbClr val="22282E"/>
+                </a:solidFill>
+              </a:rPr>
+              <a:t>•  Forja un Golden Ticket y accede al DC.</a:t>
+            </a:r>
+          </a:p>
+          <a:p>
+            <a:pPr>
+              <a:spcAft>
+                <a:spcPts val="600"/>
+              </a:spcAft>
+            </a:pPr>
+            <a:r>
+              <a:rPr sz="1500">
+                <a:solidFill>
+                  <a:srgbClr val="22282E"/>
+                </a:solidFill>
+              </a:rPr>
+              <a:t>•  Forja un Silver Ticket y compáralo con el Golden en sigilo.</a:t>
+            </a:r>
+          </a:p>
+          <a:p>
+            <a:pPr>
+              <a:spcAft>
+                <a:spcPts val="600"/>
+              </a:spcAft>
+            </a:pPr>
+            <a:r>
+              <a:rPr sz="1500">
+                <a:solidFill>
+                  <a:srgbClr val="22282E"/>
+                </a:solidFill>
+              </a:rPr>
+              <a:t>•  Explica por qué hay que resetear krbtgt dos veces.</a:t>
+            </a:r>
+          </a:p>
+          <a:p>
+            <a:pPr>
+              <a:spcAft>
+                <a:spcPts val="600"/>
+              </a:spcAft>
+            </a:pPr>
+            <a:r>
+              <a:rPr sz="1500">
+                <a:solidFill>
+                  <a:srgbClr val="22282E"/>
+                </a:solidFill>
+              </a:rPr>
+              <a:t>•  Escribe la lógica de detección basada en el evento 4662.</a:t>
             </a:r>
           </a:p>
         </p:txBody>
@@ -3347,7 +3365,7 @@
                   <a:srgbClr val="0B3D2E"/>
                 </a:solidFill>
               </a:rPr>
-              <a:t>❓ Preguntas frecuentes</a:t>
+              <a:t>📝 Reto verificable</a:t>
             </a:r>
           </a:p>
         </p:txBody>
@@ -3385,82 +3403,22 @@
                   <a:srgbClr val="22282E"/>
                 </a:solidFill>
               </a:rPr>
-              <a:t>•  ❓ ¿Por qué DCSync no "toca" el DC como un dump?</a:t>
-            </a:r>
-          </a:p>
-          <a:p>
-            <a:pPr>
-              <a:spcAft>
-                <a:spcPts val="600"/>
-              </a:spcAft>
-            </a:pPr>
-            <a:r>
-              <a:rPr sz="1500">
-                <a:solidFill>
-                  <a:srgbClr val="22282E"/>
-                </a:solidFill>
-              </a:rPr>
-              <a:t>•  Porque usa el protocolo de replicación legítimo (MS-DRSR): pide los datos como lo haría otro DC. Por eso es sigiloso, aunque el evento 4662 lo revela.</a:t>
-            </a:r>
-          </a:p>
-          <a:p>
-            <a:pPr>
-              <a:spcAft>
-                <a:spcPts val="600"/>
-              </a:spcAft>
-            </a:pPr>
-            <a:r>
-              <a:rPr sz="1500">
-                <a:solidFill>
-                  <a:srgbClr val="22282E"/>
-                </a:solidFill>
-              </a:rPr>
-              <a:t>•  ❓ ¿Cambiar la contraseña de Administrator invalida el Golden Ticket?</a:t>
-            </a:r>
-          </a:p>
-          <a:p>
-            <a:pPr>
-              <a:spcAft>
-                <a:spcPts val="600"/>
-              </a:spcAft>
-            </a:pPr>
-            <a:r>
-              <a:rPr sz="1500">
-                <a:solidFill>
-                  <a:srgbClr val="22282E"/>
-                </a:solidFill>
-              </a:rPr>
-              <a:t>•  No. Solo resetear krbtgt (dos veces) invalida los golden tickets. Por eso es la peor persistencia posible.</a:t>
-            </a:r>
-          </a:p>
-          <a:p>
-            <a:pPr>
-              <a:spcAft>
-                <a:spcPts val="600"/>
-              </a:spcAft>
-            </a:pPr>
-            <a:r>
-              <a:rPr sz="1500">
-                <a:solidFill>
-                  <a:srgbClr val="22282E"/>
-                </a:solidFill>
-              </a:rPr>
-              <a:t>•  ❓ ¿Golden o Silver Ticket?</a:t>
-            </a:r>
-          </a:p>
-          <a:p>
-            <a:pPr>
-              <a:spcAft>
-                <a:spcPts val="600"/>
-              </a:spcAft>
-            </a:pPr>
-            <a:r>
-              <a:rPr sz="1500">
-                <a:solidFill>
-                  <a:srgbClr val="22282E"/>
-                </a:solidFill>
-              </a:rPr>
-              <a:t>•  Golden da acceso total pero es más detectable; Silver es acotado a un servicio pero más sigiloso porque no solicita TGS al DC.</a:t>
+              <a:t>•  Demuestra en un dominio desechable la cadena DCSync → compromiso de krbtgt → ticket forjado contra un recurso marcador preparado por la white cell, y restaura después el snapshot.</a:t>
+            </a:r>
+          </a:p>
+          <a:p>
+            <a:pPr>
+              <a:spcAft>
+                <a:spcPts val="600"/>
+              </a:spcAft>
+            </a:pPr>
+            <a:r>
+              <a:rPr sz="1500">
+                <a:solidFill>
+                  <a:srgbClr val="22282E"/>
+                </a:solidFill>
+              </a:rPr>
+              <a:t>•  Criterio de aceptación: documentas el derecho que habilitó la replicación, la identidad y origen de la solicitud, el ticket observado con klist, las señales defensivas y un plan de recuperación que…</a:t>
             </a:r>
           </a:p>
         </p:txBody>
@@ -3511,7 +3469,7 @@
                   <a:srgbClr val="0B3D2E"/>
                 </a:solidFill>
               </a:rPr>
-              <a:t>🔗 Referencias</a:t>
+              <a:t>⚠️ Errores comunes</a:t>
             </a:r>
           </a:p>
         </p:txBody>
@@ -3549,56 +3507,459 @@
                   <a:srgbClr val="22282E"/>
                 </a:solidFill>
               </a:rPr>
-              <a:t>•  The Hacker Recipes — DCSync / Kerberos tickets. &lt;https://www.thehacker.recipes/ad/movement/&gt;</a:t>
-            </a:r>
-          </a:p>
-          <a:p>
-            <a:pPr>
-              <a:spcAft>
-                <a:spcPts val="600"/>
-              </a:spcAft>
-            </a:pPr>
-            <a:r>
-              <a:rPr sz="1500">
-                <a:solidFill>
-                  <a:srgbClr val="22282E"/>
-                </a:solidFill>
-              </a:rPr>
-              <a:t>•  MITRE ATT&amp;CK — DCSync (T1003.006), Golden Ticket (T1558.001). &lt;https://attack.mitre.org/&gt;</a:t>
-            </a:r>
-          </a:p>
-          <a:p>
-            <a:pPr>
-              <a:spcAft>
-                <a:spcPts val="600"/>
-              </a:spcAft>
-            </a:pPr>
-            <a:r>
-              <a:rPr sz="1500">
-                <a:solidFill>
-                  <a:srgbClr val="22282E"/>
-                </a:solidFill>
-              </a:rPr>
-              <a:t>•  Impacket secretsdump. &lt;https://github.com/fortra/impacket&gt;</a:t>
-            </a:r>
-          </a:p>
-          <a:p>
-            <a:pPr>
-              <a:spcAft>
-                <a:spcPts val="600"/>
-              </a:spcAft>
-            </a:pPr>
-            <a:r>
-              <a:rPr sz="1500">
-                <a:solidFill>
-                  <a:srgbClr val="22282E"/>
-                </a:solidFill>
-              </a:rPr>
-              <a:t>•  Microsoft — KRBTGT account maintenance. &lt;https://learn.microsoft.com/&gt;</a:t>
-            </a:r>
-          </a:p>
-        </p:txBody>
-      </p:sp>
+              <a:t>•  DCSync access denied — Falta el derecho de replicación; usa una cuenta/ruta que lo tenga</a:t>
+            </a:r>
+          </a:p>
+          <a:p>
+            <a:pPr>
+              <a:spcAft>
+                <a:spcPts val="600"/>
+              </a:spcAft>
+            </a:pPr>
+            <a:r>
+              <a:rPr sz="1500">
+                <a:solidFill>
+                  <a:srgbClr val="22282E"/>
+                </a:solidFill>
+              </a:rPr>
+              <a:t>•  Golden Ticket no funciona — SID o hash de krbtgt incorrectos; verifica ambos</a:t>
+            </a:r>
+          </a:p>
+          <a:p>
+            <a:pPr>
+              <a:spcAft>
+                <a:spcPts val="600"/>
+              </a:spcAft>
+            </a:pPr>
+            <a:r>
+              <a:rPr sz="1500">
+                <a:solidFill>
+                  <a:srgbClr val="22282E"/>
+                </a:solidFill>
+              </a:rPr>
+              <a:t>•  El ticket expira raro — Vida por defecto muy larga delata; ajusta tiempos realistas</a:t>
+            </a:r>
+          </a:p>
+          <a:p>
+            <a:pPr>
+              <a:spcAft>
+                <a:spcPts val="600"/>
+              </a:spcAft>
+            </a:pPr>
+            <a:r>
+              <a:rPr sz="1500">
+                <a:solidFill>
+                  <a:srgbClr val="22282E"/>
+                </a:solidFill>
+              </a:rPr>
+              <a:t>•  Silver no accede — Hash o SPN equivocado; usa el hash de la cuenta correcta</a:t>
+            </a:r>
+          </a:p>
+          <a:p>
+            <a:pPr>
+              <a:spcAft>
+                <a:spcPts val="600"/>
+              </a:spcAft>
+            </a:pPr>
+            <a:r>
+              <a:rPr sz="1500">
+                <a:solidFill>
+                  <a:srgbClr val="22282E"/>
+                </a:solidFill>
+              </a:rPr>
+              <a:t>•  Detectado por 4662 — DCSync desde un host no-DC es anómalo; asúmelo como telemetría</a:t>
+            </a:r>
+          </a:p>
+        </p:txBody>
+      </p:sp>
+    </p:spTree>
+  </p:cSld>
+  <p:clrMapOvr>
+    <a:masterClrMapping/>
+  </p:clrMapOvr>
+</p:sld>
+</file>
+
+<file path=ppt/slides/slide13.xml><?xml version="1.0" encoding="utf-8"?>
+<p:sld xmlns:a="http://schemas.openxmlformats.org/drawingml/2006/main" xmlns:p="http://schemas.openxmlformats.org/presentationml/2006/main" xmlns:r="http://schemas.openxmlformats.org/officeDocument/2006/relationships">
+  <p:cSld>
+    <p:spTree>
+      <p:nvGrpSpPr>
+        <p:cNvPr id="1" name=""/>
+        <p:cNvGrpSpPr/>
+        <p:nvPr/>
+      </p:nvGrpSpPr>
+      <p:grpSpPr/>
+      <p:sp>
+        <p:nvSpPr>
+          <p:cNvPr id="2" name="TextBox 1"/>
+          <p:cNvSpPr txBox="1"/>
+          <p:nvPr/>
+        </p:nvSpPr>
+        <p:spPr>
+          <a:xfrm>
+            <a:off x="457200" y="320040"/>
+            <a:ext cx="8229600" cy="822960"/>
+          </a:xfrm>
+          <a:prstGeom prst="rect">
+            <a:avLst/>
+          </a:prstGeom>
+          <a:noFill/>
+        </p:spPr>
+        <p:txBody>
+          <a:bodyPr wrap="square">
+            <a:spAutoFit/>
+          </a:bodyPr>
+          <a:lstStyle/>
+          <a:p>
+            <a:r>
+              <a:rPr sz="2600" b="1">
+                <a:solidFill>
+                  <a:srgbClr val="0B3D2E"/>
+                </a:solidFill>
+              </a:rPr>
+              <a:t>❓ Preguntas frecuentes</a:t>
+            </a:r>
+          </a:p>
+        </p:txBody>
+      </p:sp>
+      <p:sp>
+        <p:nvSpPr>
+          <p:cNvPr id="3" name="TextBox 2"/>
+          <p:cNvSpPr txBox="1"/>
+          <p:nvPr/>
+        </p:nvSpPr>
+        <p:spPr>
+          <a:xfrm>
+            <a:off x="457200" y="1280160"/>
+            <a:ext cx="8229600" cy="4937760"/>
+          </a:xfrm>
+          <a:prstGeom prst="rect">
+            <a:avLst/>
+          </a:prstGeom>
+          <a:noFill/>
+        </p:spPr>
+        <p:txBody>
+          <a:bodyPr wrap="square">
+            <a:spAutoFit/>
+          </a:bodyPr>
+          <a:lstStyle/>
+          <a:p>
+            <a:pPr>
+              <a:spcAft>
+                <a:spcPts val="600"/>
+              </a:spcAft>
+            </a:pPr>
+            <a:r>
+              <a:rPr sz="1500">
+                <a:solidFill>
+                  <a:srgbClr val="22282E"/>
+                </a:solidFill>
+              </a:rPr>
+              <a:t>•  ❓ ¿Por qué DCSync no "toca" el DC como un dump?</a:t>
+            </a:r>
+          </a:p>
+          <a:p>
+            <a:pPr>
+              <a:spcAft>
+                <a:spcPts val="600"/>
+              </a:spcAft>
+            </a:pPr>
+            <a:r>
+              <a:rPr sz="1500">
+                <a:solidFill>
+                  <a:srgbClr val="22282E"/>
+                </a:solidFill>
+              </a:rPr>
+              <a:t>•  Porque usa el protocolo de replicación legítimo (MS-DRSR): pide los datos como lo haría otro DC. Por eso es sigiloso, aunque el evento 4662 lo revela.</a:t>
+            </a:r>
+          </a:p>
+          <a:p>
+            <a:pPr>
+              <a:spcAft>
+                <a:spcPts val="600"/>
+              </a:spcAft>
+            </a:pPr>
+            <a:r>
+              <a:rPr sz="1500">
+                <a:solidFill>
+                  <a:srgbClr val="22282E"/>
+                </a:solidFill>
+              </a:rPr>
+              <a:t>•  ❓ ¿Cambiar la contraseña de Administrator invalida el Golden Ticket?</a:t>
+            </a:r>
+          </a:p>
+          <a:p>
+            <a:pPr>
+              <a:spcAft>
+                <a:spcPts val="600"/>
+              </a:spcAft>
+            </a:pPr>
+            <a:r>
+              <a:rPr sz="1500">
+                <a:solidFill>
+                  <a:srgbClr val="22282E"/>
+                </a:solidFill>
+              </a:rPr>
+              <a:t>•  No. Solo resetear krbtgt (dos veces) invalida los golden tickets. Por eso es la peor persistencia posible.</a:t>
+            </a:r>
+          </a:p>
+          <a:p>
+            <a:pPr>
+              <a:spcAft>
+                <a:spcPts val="600"/>
+              </a:spcAft>
+            </a:pPr>
+            <a:r>
+              <a:rPr sz="1500">
+                <a:solidFill>
+                  <a:srgbClr val="22282E"/>
+                </a:solidFill>
+              </a:rPr>
+              <a:t>•  ❓ ¿Golden o Silver Ticket?</a:t>
+            </a:r>
+          </a:p>
+          <a:p>
+            <a:pPr>
+              <a:spcAft>
+                <a:spcPts val="600"/>
+              </a:spcAft>
+            </a:pPr>
+            <a:r>
+              <a:rPr sz="1500">
+                <a:solidFill>
+                  <a:srgbClr val="22282E"/>
+                </a:solidFill>
+              </a:rPr>
+              <a:t>•  Golden afecta la confianza de emisión de TGT del dominio; Silver se limita a la clave y servicio asociados. Su detectabilidad depende de la telemetría y del procedimiento: que una ruta no solicite un…</a:t>
+            </a:r>
+          </a:p>
+        </p:txBody>
+      </p:sp>
+    </p:spTree>
+  </p:cSld>
+  <p:clrMapOvr>
+    <a:masterClrMapping/>
+  </p:clrMapOvr>
+</p:sld>
+</file>
+
+<file path=ppt/slides/slide14.xml><?xml version="1.0" encoding="utf-8"?>
+<p:sld xmlns:a="http://schemas.openxmlformats.org/drawingml/2006/main" xmlns:p="http://schemas.openxmlformats.org/presentationml/2006/main" xmlns:r="http://schemas.openxmlformats.org/officeDocument/2006/relationships">
+  <p:cSld>
+    <p:spTree>
+      <p:nvGrpSpPr>
+        <p:cNvPr id="1" name=""/>
+        <p:cNvGrpSpPr/>
+        <p:nvPr/>
+      </p:nvGrpSpPr>
+      <p:grpSpPr/>
+      <p:sp>
+        <p:nvSpPr>
+          <p:cNvPr id="2" name="TextBox 1"/>
+          <p:cNvSpPr txBox="1"/>
+          <p:nvPr/>
+        </p:nvSpPr>
+        <p:spPr>
+          <a:xfrm>
+            <a:off x="457200" y="320040"/>
+            <a:ext cx="8229600" cy="822960"/>
+          </a:xfrm>
+          <a:prstGeom prst="rect">
+            <a:avLst/>
+          </a:prstGeom>
+          <a:noFill/>
+        </p:spPr>
+        <p:txBody>
+          <a:bodyPr wrap="square">
+            <a:spAutoFit/>
+          </a:bodyPr>
+          <a:lstStyle/>
+          <a:p>
+            <a:r>
+              <a:rPr sz="2600" b="1">
+                <a:solidFill>
+                  <a:srgbClr val="0B3D2E"/>
+                </a:solidFill>
+              </a:rPr>
+              <a:t>🔗 Referencias</a:t>
+            </a:r>
+          </a:p>
+        </p:txBody>
+      </p:sp>
+      <p:sp>
+        <p:nvSpPr>
+          <p:cNvPr id="3" name="TextBox 2"/>
+          <p:cNvSpPr txBox="1"/>
+          <p:nvPr/>
+        </p:nvSpPr>
+        <p:spPr>
+          <a:xfrm>
+            <a:off x="457200" y="1280160"/>
+            <a:ext cx="8229600" cy="4937760"/>
+          </a:xfrm>
+          <a:prstGeom prst="rect">
+            <a:avLst/>
+          </a:prstGeom>
+          <a:noFill/>
+        </p:spPr>
+        <p:txBody>
+          <a:bodyPr wrap="square">
+            <a:spAutoFit/>
+          </a:bodyPr>
+          <a:lstStyle/>
+          <a:p>
+            <a:pPr>
+              <a:spcAft>
+                <a:spcPts val="600"/>
+              </a:spcAft>
+            </a:pPr>
+            <a:r>
+              <a:rPr sz="1500">
+                <a:solidFill>
+                  <a:srgbClr val="22282E"/>
+                </a:solidFill>
+              </a:rPr>
+              <a:t>•  MITRE ATT&amp;CK — DCSync (T1003.006). &lt;https://attack.mitre.org/techniques/T1003/006/&gt; — requisitos de replicación, mitigaciones y detección.</a:t>
+            </a:r>
+          </a:p>
+          <a:p>
+            <a:pPr>
+              <a:spcAft>
+                <a:spcPts val="600"/>
+              </a:spcAft>
+            </a:pPr>
+            <a:r>
+              <a:rPr sz="1500">
+                <a:solidFill>
+                  <a:srgbClr val="22282E"/>
+                </a:solidFill>
+              </a:rPr>
+              <a:t>•  MITRE ATT&amp;CK — Golden Ticket (T1558.001). &lt;https://attack.mitre.org/techniques/T1558/001/&gt; — relación entre clave de krbtgt, TGT forjado y solicitudes TGS.</a:t>
+            </a:r>
+          </a:p>
+          <a:p>
+            <a:pPr>
+              <a:spcAft>
+                <a:spcPts val="600"/>
+              </a:spcAft>
+            </a:pPr>
+            <a:r>
+              <a:rPr sz="1500">
+                <a:solidFill>
+                  <a:srgbClr val="22282E"/>
+                </a:solidFill>
+              </a:rPr>
+              <a:t>•  Microsoft — AD Forest Recovery: Reset the krbtgt password. &lt;https://learn.microsoft.com/en-us/windows-server/identity/ad-ds/manage/forest-recovery-guide/ad-forest-recovery-reset-the-krbtgt-password&gt;…</a:t>
+            </a:r>
+          </a:p>
+          <a:p>
+            <a:pPr>
+              <a:spcAft>
+                <a:spcPts val="600"/>
+              </a:spcAft>
+            </a:pPr>
+            <a:r>
+              <a:rPr sz="1500">
+                <a:solidFill>
+                  <a:srgbClr val="22282E"/>
+                </a:solidFill>
+              </a:rPr>
+              <a:t>•  Microsoft — Best Practices for Securing Active Directory. &lt;https://learn.microsoft.com/en-us/windows-server/identity/ad-ds/plan/security-best-practices/best-practices-for-securing-active-directory&gt; —…</a:t>
+            </a:r>
+          </a:p>
+          <a:p>
+            <a:pPr>
+              <a:spcAft>
+                <a:spcPts val="600"/>
+              </a:spcAft>
+            </a:pPr>
+            <a:r>
+              <a:rPr sz="1500">
+                <a:solidFill>
+                  <a:srgbClr val="22282E"/>
+                </a:solidFill>
+              </a:rPr>
+              <a:t>•  Impacket. &lt;https://github.com/fortra/impacket&gt; — documentación de secretsdump utilizada solo para la demostración controlada.</a:t>
+            </a:r>
+          </a:p>
+        </p:txBody>
+      </p:sp>
+    </p:spTree>
+  </p:cSld>
+  <p:clrMapOvr>
+    <a:masterClrMapping/>
+  </p:clrMapOvr>
+</p:sld>
+</file>
+
+<file path=ppt/slides/slide15.xml><?xml version="1.0" encoding="utf-8"?>
+<p:sld xmlns:a="http://schemas.openxmlformats.org/drawingml/2006/main" xmlns:p="http://schemas.openxmlformats.org/presentationml/2006/main" xmlns:r="http://schemas.openxmlformats.org/officeDocument/2006/relationships">
+  <p:cSld>
+    <p:spTree>
+      <p:nvGrpSpPr>
+        <p:cNvPr id="1" name=""/>
+        <p:cNvGrpSpPr/>
+        <p:nvPr/>
+      </p:nvGrpSpPr>
+      <p:grpSpPr/>
+      <p:sp>
+        <p:nvSpPr>
+          <p:cNvPr id="2" name="TextBox 1"/>
+          <p:cNvSpPr txBox="1"/>
+          <p:nvPr/>
+        </p:nvSpPr>
+        <p:spPr>
+          <a:xfrm>
+            <a:off x="457200" y="274320"/>
+            <a:ext cx="8229600" cy="640080"/>
+          </a:xfrm>
+          <a:prstGeom prst="rect">
+            <a:avLst/>
+          </a:prstGeom>
+          <a:noFill/>
+        </p:spPr>
+        <p:txBody>
+          <a:bodyPr wrap="square">
+            <a:spAutoFit/>
+          </a:bodyPr>
+          <a:lstStyle/>
+          <a:p>
+            <a:r>
+              <a:rPr sz="2200" b="1">
+                <a:solidFill>
+                  <a:srgbClr val="0B3D2E"/>
+                </a:solidFill>
+              </a:rPr>
+              <a:t>Diagrama de la clase</a:t>
+            </a:r>
+          </a:p>
+        </p:txBody>
+      </p:sp>
+      <p:pic>
+        <p:nvPicPr>
+          <p:cNvPr id="3" name="Picture 2" descr="10d28d2c031ef1cb.png"/>
+          <p:cNvPicPr>
+            <a:picLocks noChangeAspect="1"/>
+          </p:cNvPicPr>
+          <p:nvPr/>
+        </p:nvPicPr>
+        <p:blipFill>
+          <a:blip r:embed="rId2"/>
+          <a:stretch>
+            <a:fillRect/>
+          </a:stretch>
+        </p:blipFill>
+        <p:spPr>
+          <a:xfrm>
+            <a:off x="457200" y="3264408"/>
+            <a:ext cx="8229600" cy="969264"/>
+          </a:xfrm>
+          <a:prstGeom prst="rect">
+            <a:avLst/>
+          </a:prstGeom>
+        </p:spPr>
+      </p:pic>
     </p:spTree>
   </p:cSld>
   <p:clrMapOvr>
@@ -3683,7 +4044,7 @@
                   <a:srgbClr val="22282E"/>
                 </a:solidFill>
               </a:rPr>
-              <a:t>•  Ejecutar las técnicas que representan el "game over" de un dominio: DCSync (replicar el directorio para robar todos los hashes, incluido el de krbtgt) y Golden Ticket (forjar un TGT válido para cualquier usuario). El alumno comprenderá por qué estas técnicas otorgan control total y persistente, y cómo se detectan pese a su sigilo.</a:t>
+              <a:t>•  Ejecutar las técnicas que representan el "game over" de un dominio: DCSync (replicar el directorio para robar todos los hashes, incluido el de krbtgt) y Golden Ticket (forjar un TGT válido para…</a:t>
             </a:r>
           </a:p>
         </p:txBody>
@@ -3787,7 +4148,7 @@
                   <a:srgbClr val="22282E"/>
                 </a:solidFill>
               </a:rPr>
-              <a:t>•  Ejecutar DCSync para extraer el hash de krbtgt y de cualquier cuenta.</a:t>
+              <a:t>•  Demostrar en un dominio desechable cómo una identidad con derechos de replicación puede solicitar material de krbtgt, limitando y registrando el alcance.</a:t>
             </a:r>
           </a:p>
           <a:p>
@@ -4077,7 +4438,7 @@
                   <a:srgbClr val="0B3D2E"/>
                 </a:solidFill>
               </a:rPr>
-              <a:t>📖 Definiciones y características</a:t>
+              <a:t>🧠 Explicación en profundidad</a:t>
             </a:r>
           </a:p>
         </p:txBody>
@@ -4115,82 +4476,97 @@
                   <a:srgbClr val="22282E"/>
                 </a:solidFill>
               </a:rPr>
-              <a:t>•  DCSync: abusar de los derechos de replicación (DS-Replication-Get-Changes) para pedir al DC los hashes. Característica: se ve como replicación legítima entre DCs.</a:t>
-            </a:r>
-          </a:p>
-          <a:p>
-            <a:pPr>
-              <a:spcAft>
-                <a:spcPts val="600"/>
-              </a:spcAft>
-            </a:pPr>
-            <a:r>
-              <a:rPr sz="1500">
-                <a:solidFill>
-                  <a:srgbClr val="22282E"/>
-                </a:solidFill>
-              </a:rPr>
-              <a:t>•  krbtgt: cuenta cuyo hash cifra todos los TGT del dominio. Característica: quien lo tiene, forja identidad de cualquiera.</a:t>
-            </a:r>
-          </a:p>
-          <a:p>
-            <a:pPr>
-              <a:spcAft>
-                <a:spcPts val="600"/>
-              </a:spcAft>
-            </a:pPr>
-            <a:r>
-              <a:rPr sz="1500">
-                <a:solidFill>
-                  <a:srgbClr val="22282E"/>
-                </a:solidFill>
-              </a:rPr>
-              <a:t>•  Golden Ticket: TGT forjado con el hash de krbtgt. Característica: acceso total, válido hasta cambiar krbtgt (dos veces).</a:t>
-            </a:r>
-          </a:p>
-          <a:p>
-            <a:pPr>
-              <a:spcAft>
-                <a:spcPts val="600"/>
-              </a:spcAft>
-            </a:pPr>
-            <a:r>
-              <a:rPr sz="1500">
-                <a:solidFill>
-                  <a:srgbClr val="22282E"/>
-                </a:solidFill>
-              </a:rPr>
-              <a:t>•  Silver Ticket: TGS forjado con el hash de una cuenta de servicio. Característica: acceso a un servicio concreto, más sigiloso.</a:t>
-            </a:r>
-          </a:p>
-          <a:p>
-            <a:pPr>
-              <a:spcAft>
-                <a:spcPts val="600"/>
-              </a:spcAft>
-            </a:pPr>
-            <a:r>
-              <a:rPr sz="1500">
-                <a:solidFill>
-                  <a:srgbClr val="22282E"/>
-                </a:solidFill>
-              </a:rPr>
-              <a:t>•  Derechos de replicación: permisos que normalmente tienen los DCs (y DA). Característica: si un usuario los obtiene, puede DCSync.</a:t>
-            </a:r>
-          </a:p>
-          <a:p>
-            <a:pPr>
-              <a:spcAft>
-                <a:spcPts val="600"/>
-              </a:spcAft>
-            </a:pPr>
-            <a:r>
-              <a:rPr sz="1500">
-                <a:solidFill>
-                  <a:srgbClr val="22282E"/>
-                </a:solidFill>
-              </a:rPr>
-              <a:t>•  KRBTGT reset: cambiar dos veces la contraseña de krbtgt invalida golden tickets. Característica: única remediación real tras el compromiso.</a:t>
+              <a:t>•  Los controladores de dominio replican cambios para mantener copias coherentes del directorio. DCSync imita solicitudes de replicación con una identidad que posee derechos suficientes, como…</a:t>
+            </a:r>
+          </a:p>
+          <a:p>
+            <a:pPr>
+              <a:spcAft>
+                <a:spcPts val="600"/>
+              </a:spcAft>
+            </a:pPr>
+            <a:r>
+              <a:rPr sz="1500">
+                <a:solidFill>
+                  <a:srgbClr val="22282E"/>
+                </a:solidFill>
+              </a:rPr>
+              <a:t>•  La consecuencia es grave porque puede exponer material de credenciales sin una extracción convencional dentro de LSASS del DC. Pero decir que «parece totalmente legítimo» es excesivo. La defensa…</a:t>
+            </a:r>
+          </a:p>
+          <a:p>
+            <a:pPr>
+              <a:spcAft>
+                <a:spcPts val="600"/>
+              </a:spcAft>
+            </a:pPr>
+            <a:r>
+              <a:rPr sz="1500">
+                <a:solidFill>
+                  <a:srgbClr val="22282E"/>
+                </a:solidFill>
+              </a:rPr>
+              <a:t>•  ATT&amp;CK define T1558.001 como la forja de un TGT mediante material de krbtgt. También se necesita contexto correcto del dominio. El ticket permite representar identidades y solicitar tickets de…</a:t>
+            </a:r>
+          </a:p>
+          <a:p>
+            <a:pPr>
+              <a:spcAft>
+                <a:spcPts val="600"/>
+              </a:spcAft>
+            </a:pPr>
+            <a:r>
+              <a:rPr sz="1500">
+                <a:solidFill>
+                  <a:srgbClr val="22282E"/>
+                </a:solidFill>
+              </a:rPr>
+              <a:t>•  Un Silver Ticket usa la clave de una cuenta de servicio para forjar un ticket destinado a ese servicio. Su alcance es menor y la ruta puede evitar parte de la interacción normal con el KDC, lo cual…</a:t>
+            </a:r>
+          </a:p>
+          <a:p>
+            <a:pPr>
+              <a:spcAft>
+                <a:spcPts val="600"/>
+              </a:spcAft>
+            </a:pPr>
+            <a:r>
+              <a:rPr sz="1500">
+                <a:solidFill>
+                  <a:srgbClr val="22282E"/>
+                </a:solidFill>
+              </a:rPr>
+              <a:t>•  Microsoft indica que, durante la recuperación de un bosque, la contraseña de krbtgt debe restablecerse dos veces y entre ambos cambios se debe esperar más que la vida máxima configurada de los…</a:t>
+            </a:r>
+          </a:p>
+          <a:p>
+            <a:pPr>
+              <a:spcAft>
+                <a:spcPts val="600"/>
+              </a:spcAft>
+            </a:pPr>
+            <a:r>
+              <a:rPr sz="1500">
+                <a:solidFill>
+                  <a:srgbClr val="22282E"/>
+                </a:solidFill>
+              </a:rPr>
+              <a:t>•  El cambio de krbtgt tampoco limpia cuentas persistentes, ACL maliciosas, claves de servicio ni endpoints comprometidos. La respuesta revisa derechos de replicación, administradores, confianzas, GPO…</a:t>
+            </a:r>
+          </a:p>
+          <a:p>
+            <a:pPr>
+              <a:spcAft>
+                <a:spcPts val="600"/>
+              </a:spcAft>
+            </a:pPr>
+            <a:r>
+              <a:rPr sz="1500">
+                <a:solidFill>
+                  <a:srgbClr val="22282E"/>
+                </a:solidFill>
+              </a:rPr>
+              <a:t>•  El resultado debe probar la cadena causal: derecho de replicación observado, solicitud desde origen no esperado, material afectado, consecuencia sobre tickets y señales disponibles. La restauración…</a:t>
             </a:r>
           </a:p>
         </p:txBody>
@@ -4241,7 +4617,7 @@
                   <a:srgbClr val="0B3D2E"/>
                 </a:solidFill>
               </a:rPr>
-              <a:t>🧰 Herramientas y preparación</a:t>
+              <a:t>📖 Definiciones y características</a:t>
             </a:r>
           </a:p>
         </p:txBody>
@@ -4279,37 +4655,82 @@
                   <a:srgbClr val="22282E"/>
                 </a:solidFill>
               </a:rPr>
-              <a:t>•  AD lab / GOAD con una cuenta que tenga (o a la que hayas concedido, vía una ruta de BloodHound) derechos de replicación.</a:t>
-            </a:r>
-          </a:p>
-          <a:p>
-            <a:pPr>
-              <a:spcAft>
-                <a:spcPts val="600"/>
-              </a:spcAft>
-            </a:pPr>
-            <a:r>
-              <a:rPr sz="1500">
-                <a:solidFill>
-                  <a:srgbClr val="22282E"/>
-                </a:solidFill>
-              </a:rPr>
-              <a:t>•  Impacket secretsdump.py para DCSync; Mimikatz para DCSync y forja de tickets; Rubeus como alternativa.</a:t>
-            </a:r>
-          </a:p>
-          <a:p>
-            <a:pPr>
-              <a:spcAft>
-                <a:spcPts val="600"/>
-              </a:spcAft>
-            </a:pPr>
-            <a:r>
-              <a:rPr sz="1500">
-                <a:solidFill>
-                  <a:srgbClr val="22282E"/>
-                </a:solidFill>
-              </a:rPr>
-              <a:t>•  Acceso previo con privilegios altos (DA o equivalente) obtenido en las clases anteriores.</a:t>
+              <a:t>•  DCSync: abusar de derechos de replicación para solicitar datos sensibles al DC. Característica: usa operaciones de replicación, pero el origen no-DC y las delegaciones anómalas pueden detectarse.</a:t>
+            </a:r>
+          </a:p>
+          <a:p>
+            <a:pPr>
+              <a:spcAft>
+                <a:spcPts val="600"/>
+              </a:spcAft>
+            </a:pPr>
+            <a:r>
+              <a:rPr sz="1500">
+                <a:solidFill>
+                  <a:srgbClr val="22282E"/>
+                </a:solidFill>
+              </a:rPr>
+              <a:t>•  krbtgt: cuenta cuyo hash cifra todos los TGT del dominio. Característica: quien lo tiene, forja identidad de cualquiera.</a:t>
+            </a:r>
+          </a:p>
+          <a:p>
+            <a:pPr>
+              <a:spcAft>
+                <a:spcPts val="600"/>
+              </a:spcAft>
+            </a:pPr>
+            <a:r>
+              <a:rPr sz="1500">
+                <a:solidFill>
+                  <a:srgbClr val="22282E"/>
+                </a:solidFill>
+              </a:rPr>
+              <a:t>•  Golden Ticket: TGT forjado con material de clave de krbtgt. Característica: permite representar identidades; el acceso real depende de servicio, conectividad y controles.</a:t>
+            </a:r>
+          </a:p>
+          <a:p>
+            <a:pPr>
+              <a:spcAft>
+                <a:spcPts val="600"/>
+              </a:spcAft>
+            </a:pPr>
+            <a:r>
+              <a:rPr sz="1500">
+                <a:solidFill>
+                  <a:srgbClr val="22282E"/>
+                </a:solidFill>
+              </a:rPr>
+              <a:t>•  Silver Ticket: TGS forjado con material de clave de una cuenta de servicio. Característica: alcance limitado al servicio y una secuencia de telemetría distinta, no invisibilidad garantizada.</a:t>
+            </a:r>
+          </a:p>
+          <a:p>
+            <a:pPr>
+              <a:spcAft>
+                <a:spcPts val="600"/>
+              </a:spcAft>
+            </a:pPr>
+            <a:r>
+              <a:rPr sz="1500">
+                <a:solidFill>
+                  <a:srgbClr val="22282E"/>
+                </a:solidFill>
+              </a:rPr>
+              <a:t>•  Derechos de replicación: permisos que normalmente tienen los DCs (y DA). Característica: si un usuario los obtiene, puede DCSync.</a:t>
+            </a:r>
+          </a:p>
+          <a:p>
+            <a:pPr>
+              <a:spcAft>
+                <a:spcPts val="600"/>
+              </a:spcAft>
+            </a:pPr>
+            <a:r>
+              <a:rPr sz="1500">
+                <a:solidFill>
+                  <a:srgbClr val="22282E"/>
+                </a:solidFill>
+              </a:rPr>
+              <a:t>•  KRBTGT reset: rotación coordinada de las claves de krbtgt según la guía de recuperación. Característica: dos cambios separados por la vida configurada de tickets retiran claves anteriores, pero no…</a:t>
             </a:r>
           </a:p>
         </p:txBody>
@@ -4360,7 +4781,7 @@
                   <a:srgbClr val="0B3D2E"/>
                 </a:solidFill>
               </a:rPr>
-              <a:t>🧪 Laboratorio guiado</a:t>
+              <a:t>📔 Glosario</a:t>
             </a:r>
           </a:p>
         </p:txBody>
@@ -4398,97 +4819,97 @@
                   <a:srgbClr val="22282E"/>
                 </a:solidFill>
               </a:rPr>
-              <a:t>•  Verifica los derechos. Confirma que tu cuenta (o una ruta de BloodHound) tiene DS-Replication-Get-Changes-All.</a:t>
-            </a:r>
-          </a:p>
-          <a:p>
-            <a:pPr>
-              <a:spcAft>
-                <a:spcPts val="600"/>
-              </a:spcAft>
-            </a:pPr>
-            <a:r>
-              <a:rPr sz="1500">
-                <a:solidFill>
-                  <a:srgbClr val="22282E"/>
-                </a:solidFill>
-              </a:rPr>
-              <a:t>•  DCSync con Impacket:</a:t>
-            </a:r>
-          </a:p>
-          <a:p>
-            <a:pPr>
-              <a:spcAft>
-                <a:spcPts val="600"/>
-              </a:spcAft>
-            </a:pPr>
-            <a:r>
-              <a:rPr sz="1500">
-                <a:solidFill>
-                  <a:srgbClr val="22282E"/>
-                </a:solidFill>
-              </a:rPr>
-              <a:t>•  secretsdump.py lab.local/dauser:pass@10.10.10.10 -just-dc-user krbtgt</a:t>
-            </a:r>
-          </a:p>
-          <a:p>
-            <a:pPr>
-              <a:spcAft>
-                <a:spcPts val="600"/>
-              </a:spcAft>
-            </a:pPr>
-            <a:r>
-              <a:rPr sz="1500">
-                <a:solidFill>
-                  <a:srgbClr val="22282E"/>
-                </a:solidFill>
-              </a:rPr>
-              <a:t>•  Extrae el hash NTLM de krbtgt (y de cuentas objetivo).</a:t>
-            </a:r>
-          </a:p>
-          <a:p>
-            <a:pPr>
-              <a:spcAft>
-                <a:spcPts val="600"/>
-              </a:spcAft>
-            </a:pPr>
-            <a:r>
-              <a:rPr sz="1500">
-                <a:solidFill>
-                  <a:srgbClr val="22282E"/>
-                </a:solidFill>
-              </a:rPr>
-              <a:t>•  Anota el SID del dominio: Get-DomainSID o con lookupsid.py.</a:t>
-            </a:r>
-          </a:p>
-          <a:p>
-            <a:pPr>
-              <a:spcAft>
-                <a:spcPts val="600"/>
-              </a:spcAft>
-            </a:pPr>
-            <a:r>
-              <a:rPr sz="1500">
-                <a:solidFill>
-                  <a:srgbClr val="22282E"/>
-                </a:solidFill>
-              </a:rPr>
-              <a:t>•  Forja el Golden Ticket (Mimikatz):</a:t>
-            </a:r>
-          </a:p>
-          <a:p>
-            <a:pPr>
-              <a:spcAft>
-                <a:spcPts val="600"/>
-              </a:spcAft>
-            </a:pPr>
-            <a:r>
-              <a:rPr sz="1500">
-                <a:solidFill>
-                  <a:srgbClr val="22282E"/>
-                </a:solidFill>
-              </a:rPr>
-              <a:t>•  kerberos::golden /user:Administrator /domain:lab.local /sid:&lt;DOMAINSID&gt; /krbtgt:&lt;HASH&gt; /ptt</a:t>
+              <a:t>•  Replicación de directorio: intercambio de cambios entre controladores para mantener AD DS coherente.</a:t>
+            </a:r>
+          </a:p>
+          <a:p>
+            <a:pPr>
+              <a:spcAft>
+                <a:spcPts val="600"/>
+              </a:spcAft>
+            </a:pPr>
+            <a:r>
+              <a:rPr sz="1500">
+                <a:solidFill>
+                  <a:srgbClr val="22282E"/>
+                </a:solidFill>
+              </a:rPr>
+              <a:t>•  DRS: protocolos y operaciones empleados en la replicación de Active Directory.</a:t>
+            </a:r>
+          </a:p>
+          <a:p>
+            <a:pPr>
+              <a:spcAft>
+                <a:spcPts val="600"/>
+              </a:spcAft>
+            </a:pPr>
+            <a:r>
+              <a:rPr sz="1500">
+                <a:solidFill>
+                  <a:srgbClr val="22282E"/>
+                </a:solidFill>
+              </a:rPr>
+              <a:t>•  Derecho extendido: permiso específico que autoriza operaciones más allá de lectura o escritura genérica.</a:t>
+            </a:r>
+          </a:p>
+          <a:p>
+            <a:pPr>
+              <a:spcAft>
+                <a:spcPts val="600"/>
+              </a:spcAft>
+            </a:pPr>
+            <a:r>
+              <a:rPr sz="1500">
+                <a:solidFill>
+                  <a:srgbClr val="22282E"/>
+                </a:solidFill>
+              </a:rPr>
+              <a:t>•  DCSync: solicitud de datos de replicación abusando de derechos equivalentes a los necesarios para replicar.</a:t>
+            </a:r>
+          </a:p>
+          <a:p>
+            <a:pPr>
+              <a:spcAft>
+                <a:spcPts val="600"/>
+              </a:spcAft>
+            </a:pPr>
+            <a:r>
+              <a:rPr sz="1500">
+                <a:solidFill>
+                  <a:srgbClr val="22282E"/>
+                </a:solidFill>
+              </a:rPr>
+              <a:t>•  krbtgt: cuenta especial cuyas claves usa el KDC para proteger TGT.</a:t>
+            </a:r>
+          </a:p>
+          <a:p>
+            <a:pPr>
+              <a:spcAft>
+                <a:spcPts val="600"/>
+              </a:spcAft>
+            </a:pPr>
+            <a:r>
+              <a:rPr sz="1500">
+                <a:solidFill>
+                  <a:srgbClr val="22282E"/>
+                </a:solidFill>
+              </a:rPr>
+              <a:t>•  Golden Ticket: TGT forjado con material de krbtgt.</a:t>
+            </a:r>
+          </a:p>
+          <a:p>
+            <a:pPr>
+              <a:spcAft>
+                <a:spcPts val="600"/>
+              </a:spcAft>
+            </a:pPr>
+            <a:r>
+              <a:rPr sz="1500">
+                <a:solidFill>
+                  <a:srgbClr val="22282E"/>
+                </a:solidFill>
+              </a:rPr>
+              <a:t>•  Silver Ticket: ticket de servicio forjado con la clave de una cuenta de servicio.</a:t>
             </a:r>
           </a:p>
         </p:txBody>
@@ -4539,7 +4960,7 @@
                   <a:srgbClr val="0B3D2E"/>
                 </a:solidFill>
               </a:rPr>
-              <a:t>✍️ Ejercicios</a:t>
+              <a:t>🧰 Herramientas y preparación</a:t>
             </a:r>
           </a:p>
         </p:txBody>
@@ -4577,82 +4998,37 @@
                   <a:srgbClr val="22282E"/>
                 </a:solidFill>
               </a:rPr>
-              <a:t>•  Explica por qué el hash de krbtgt permite forjar identidad de cualquier usuario.</a:t>
-            </a:r>
-          </a:p>
-          <a:p>
-            <a:pPr>
-              <a:spcAft>
-                <a:spcPts val="600"/>
-              </a:spcAft>
-            </a:pPr>
-            <a:r>
-              <a:rPr sz="1500">
-                <a:solidFill>
-                  <a:srgbClr val="22282E"/>
-                </a:solidFill>
-              </a:rPr>
-              <a:t>•  Ejecuta DCSync y extrae el hash de krbtgt del lab.</a:t>
-            </a:r>
-          </a:p>
-          <a:p>
-            <a:pPr>
-              <a:spcAft>
-                <a:spcPts val="600"/>
-              </a:spcAft>
-            </a:pPr>
-            <a:r>
-              <a:rPr sz="1500">
-                <a:solidFill>
-                  <a:srgbClr val="22282E"/>
-                </a:solidFill>
-              </a:rPr>
-              <a:t>•  Forja un Golden Ticket y accede al DC.</a:t>
-            </a:r>
-          </a:p>
-          <a:p>
-            <a:pPr>
-              <a:spcAft>
-                <a:spcPts val="600"/>
-              </a:spcAft>
-            </a:pPr>
-            <a:r>
-              <a:rPr sz="1500">
-                <a:solidFill>
-                  <a:srgbClr val="22282E"/>
-                </a:solidFill>
-              </a:rPr>
-              <a:t>•  Forja un Silver Ticket y compáralo con el Golden en sigilo.</a:t>
-            </a:r>
-          </a:p>
-          <a:p>
-            <a:pPr>
-              <a:spcAft>
-                <a:spcPts val="600"/>
-              </a:spcAft>
-            </a:pPr>
-            <a:r>
-              <a:rPr sz="1500">
-                <a:solidFill>
-                  <a:srgbClr val="22282E"/>
-                </a:solidFill>
-              </a:rPr>
-              <a:t>•  Explica por qué hay que resetear krbtgt dos veces.</a:t>
-            </a:r>
-          </a:p>
-          <a:p>
-            <a:pPr>
-              <a:spcAft>
-                <a:spcPts val="600"/>
-              </a:spcAft>
-            </a:pPr>
-            <a:r>
-              <a:rPr sz="1500">
-                <a:solidFill>
-                  <a:srgbClr val="22282E"/>
-                </a:solidFill>
-              </a:rPr>
-              <a:t>•  Escribe la lógica de detección basada en el evento 4662.</a:t>
+              <a:t>•  AD lab / GOAD con una cuenta que tenga (o a la que hayas concedido, vía una ruta de BloodHound) derechos de replicación.</a:t>
+            </a:r>
+          </a:p>
+          <a:p>
+            <a:pPr>
+              <a:spcAft>
+                <a:spcPts val="600"/>
+              </a:spcAft>
+            </a:pPr>
+            <a:r>
+              <a:rPr sz="1500">
+                <a:solidFill>
+                  <a:srgbClr val="22282E"/>
+                </a:solidFill>
+              </a:rPr>
+              <a:t>•  Impacket secretsdump.py para DCSync; Mimikatz para DCSync y forja de tickets; Rubeus como alternativa.</a:t>
+            </a:r>
+          </a:p>
+          <a:p>
+            <a:pPr>
+              <a:spcAft>
+                <a:spcPts val="600"/>
+              </a:spcAft>
+            </a:pPr>
+            <a:r>
+              <a:rPr sz="1500">
+                <a:solidFill>
+                  <a:srgbClr val="22282E"/>
+                </a:solidFill>
+              </a:rPr>
+              <a:t>•  Acceso previo con privilegios altos (DA o equivalente) obtenido en las clases anteriores.</a:t>
             </a:r>
           </a:p>
         </p:txBody>
@@ -4703,7 +5079,7 @@
                   <a:srgbClr val="0B3D2E"/>
                 </a:solidFill>
               </a:rPr>
-              <a:t>📝 Reto verificable</a:t>
+              <a:t>🧪 Laboratorio guiado</a:t>
             </a:r>
           </a:p>
         </p:txBody>
@@ -4741,22 +5117,97 @@
                   <a:srgbClr val="22282E"/>
                 </a:solidFill>
               </a:rPr>
-              <a:t>•  Logra acceso total al DC de tu AD lab mediante DCSync + Golden Ticket: extrae el hash de krbtgt, forja un TGT de Administrator y úsalo para leer un recurso del DC sin credenciales adicionales.</a:t>
-            </a:r>
-          </a:p>
-          <a:p>
-            <a:pPr>
-              <a:spcAft>
-                <a:spcPts val="600"/>
-              </a:spcAft>
-            </a:pPr>
-            <a:r>
-              <a:rPr sz="1500">
-                <a:solidFill>
-                  <a:srgbClr val="22282E"/>
-                </a:solidFill>
-              </a:rPr>
-              <a:t>•  Criterio de aceptación: muestras el hash de krbtgt obtenido por DCSync, el comando de forja del Golden Ticket y una acción con éxito sobre el DC usando ese ticket; además identificas el evento 4662 que delató la replicación. Todo en tu laboratorio.</a:t>
+              <a:t>•  Verifica los derechos. Confirma que tu cuenta (o una ruta de BloodHound) tiene DS-Replication-Get-Changes-All.</a:t>
+            </a:r>
+          </a:p>
+          <a:p>
+            <a:pPr>
+              <a:spcAft>
+                <a:spcPts val="600"/>
+              </a:spcAft>
+            </a:pPr>
+            <a:r>
+              <a:rPr sz="1500">
+                <a:solidFill>
+                  <a:srgbClr val="22282E"/>
+                </a:solidFill>
+              </a:rPr>
+              <a:t>•  DCSync con Impacket:</a:t>
+            </a:r>
+          </a:p>
+          <a:p>
+            <a:pPr>
+              <a:spcAft>
+                <a:spcPts val="600"/>
+              </a:spcAft>
+            </a:pPr>
+            <a:r>
+              <a:rPr sz="1500">
+                <a:solidFill>
+                  <a:srgbClr val="22282E"/>
+                </a:solidFill>
+              </a:rPr>
+              <a:t>•  Extrae el hash NTLM de krbtgt (y de cuentas objetivo).</a:t>
+            </a:r>
+          </a:p>
+          <a:p>
+            <a:pPr>
+              <a:spcAft>
+                <a:spcPts val="600"/>
+              </a:spcAft>
+            </a:pPr>
+            <a:r>
+              <a:rPr sz="1500">
+                <a:solidFill>
+                  <a:srgbClr val="22282E"/>
+                </a:solidFill>
+              </a:rPr>
+              <a:t>•  Anota el SID del dominio: Get-DomainSID o con lookupsid.py.</a:t>
+            </a:r>
+          </a:p>
+          <a:p>
+            <a:pPr>
+              <a:spcAft>
+                <a:spcPts val="600"/>
+              </a:spcAft>
+            </a:pPr>
+            <a:r>
+              <a:rPr sz="1500">
+                <a:solidFill>
+                  <a:srgbClr val="22282E"/>
+                </a:solidFill>
+              </a:rPr>
+              <a:t>•  Forja el Golden Ticket (Mimikatz):</a:t>
+            </a:r>
+          </a:p>
+          <a:p>
+            <a:pPr>
+              <a:spcAft>
+                <a:spcPts val="600"/>
+              </a:spcAft>
+            </a:pPr>
+            <a:r>
+              <a:rPr sz="1500">
+                <a:solidFill>
+                  <a:srgbClr val="22282E"/>
+                </a:solidFill>
+              </a:rPr>
+              <a:t>•  Usa el ticket. Con el TGT forjado inyectado, accede al DC: dir \\dc01.lab.local\C$ o psexec.py sin credenciales adicionales.</a:t>
+            </a:r>
+          </a:p>
+          <a:p>
+            <a:pPr>
+              <a:spcAft>
+                <a:spcPts val="600"/>
+              </a:spcAft>
+            </a:pPr>
+            <a:r>
+              <a:rPr sz="1500">
+                <a:solidFill>
+                  <a:srgbClr val="22282E"/>
+                </a:solidFill>
+              </a:rPr>
+              <a:t>•  Silver Ticket (comparación). En el dominio desechable, compara un TGS de prueba para un servicio concreto con el flujo normal. Observa qué solicitud al KDC falta y qué telemetría permanece en…</a:t>
             </a:r>
           </a:p>
         </p:txBody>
